--- a/example2-prenormalized-dummy/results/report.pptx
+++ b/example2-prenormalized-dummy/results/report.pptx
@@ -10,7 +10,7 @@
   <p:handoutMasterIdLst>
     <p:handoutMasterId r:id="rId3"/>
   </p:handoutMasterIdLst>
-  <p:sldIdLst>
+  <p:sldIdLst xmlns:a="http://schemas.openxmlformats.org/drawingml/2006/main" xmlns:r="http://schemas.openxmlformats.org/officeDocument/2006/relationships" xmlns:p="http://schemas.openxmlformats.org/presentationml/2006/main">
     <p:sldId id="256" r:id="rId8"/>
     <p:sldId id="257" r:id="rId9"/>
     <p:sldId id="258" r:id="rId10"/>
@@ -21,6 +21,10 @@
     <p:sldId id="263" r:id="rId15"/>
     <p:sldId id="264" r:id="rId16"/>
     <p:sldId id="265" r:id="rId17"/>
+    <p:sldId id="266" r:id="rId18"/>
+    <p:sldId id="267" r:id="rId19"/>
+    <p:sldId id="268" r:id="rId20"/>
+    <p:sldId id="269" r:id="rId21"/>
   </p:sldIdLst>
   <p:sldSz cx="9144000" cy="6858000" type="screen4x3"/>
   <p:notesSz cx="6858000" cy="9144000"/>
@@ -1791,7 +1795,7 @@
           <a:chExt cx="0" cy="0"/>
         </a:xfrm>
       </p:grpSpPr>
-      <p:sp>
+      <p:sp xmlns:a="http://schemas.openxmlformats.org/drawingml/2006/main" xmlns:r="http://schemas.openxmlformats.org/officeDocument/2006/relationships" xmlns:p="http://schemas.openxmlformats.org/presentationml/2006/main">
         <p:nvSpPr>
           <p:cNvPr id="2" name="Title 1"/>
           <p:cNvSpPr>
@@ -1818,7 +1822,7 @@
           </a:p>
         </p:txBody>
       </p:sp>
-      <p:sp>
+      <p:sp xmlns:a="http://schemas.openxmlformats.org/drawingml/2006/main" xmlns:r="http://schemas.openxmlformats.org/officeDocument/2006/relationships" xmlns:p="http://schemas.openxmlformats.org/presentationml/2006/main">
         <p:nvSpPr>
           <p:cNvPr id="3" name="Subtitle 2"/>
           <p:cNvSpPr>
@@ -1870,7 +1874,7 @@
           <a:chExt cx="0" cy="0"/>
         </a:xfrm>
       </p:grpSpPr>
-      <p:sp>
+      <p:sp xmlns:a="http://schemas.openxmlformats.org/drawingml/2006/main" xmlns:r="http://schemas.openxmlformats.org/officeDocument/2006/relationships" xmlns:p="http://schemas.openxmlformats.org/presentationml/2006/main">
         <p:nvSpPr>
           <p:cNvPr id="2" name="Title 1"/>
           <p:cNvSpPr>
@@ -1897,7 +1901,7 @@
           </a:p>
         </p:txBody>
       </p:sp>
-      <p:sp>
+      <p:sp xmlns:a="http://schemas.openxmlformats.org/drawingml/2006/main" xmlns:r="http://schemas.openxmlformats.org/officeDocument/2006/relationships" xmlns:p="http://schemas.openxmlformats.org/presentationml/2006/main">
         <p:nvSpPr>
           <p:cNvPr id="3" name="Text Placeholder 4"/>
           <p:cNvSpPr>
@@ -1919,12 +1923,12 @@
           <a:p>
             <a:r>
               <a:rPr/>
-              <a:t>Differential FDR&lt;0.25</a:t>
-            </a:r>
-          </a:p>
-        </p:txBody>
-      </p:sp>
-      <p:sp>
+              <a:t>Normalized PCA</a:t>
+            </a:r>
+          </a:p>
+        </p:txBody>
+      </p:sp>
+      <p:sp xmlns:a="http://schemas.openxmlformats.org/drawingml/2006/main" xmlns:r="http://schemas.openxmlformats.org/officeDocument/2006/relationships" xmlns:p="http://schemas.openxmlformats.org/presentationml/2006/main">
         <p:nvSpPr>
           <p:cNvPr id="4" name="Text Placeholder 2"/>
           <p:cNvSpPr>
@@ -1946,12 +1950,12 @@
           <a:p>
             <a:r>
               <a:rPr/>
-              <a:t>Complete Set FDR=1</a:t>
-            </a:r>
-          </a:p>
-        </p:txBody>
-      </p:sp>
-      <p:pic>
+              <a:t>Raw PCA</a:t>
+            </a:r>
+          </a:p>
+        </p:txBody>
+      </p:sp>
+      <p:pic xmlns:a="http://schemas.openxmlformats.org/drawingml/2006/main" xmlns:r="http://schemas.openxmlformats.org/officeDocument/2006/relationships" xmlns:p="http://schemas.openxmlformats.org/presentationml/2006/main">
         <p:nvPicPr>
           <p:cNvPr id="5" name="" descr=""/>
           <p:cNvPicPr>
@@ -1970,14 +1974,620 @@
         <p:spPr>
           <a:xfrm>
             <a:off x="4645152" y="1426464"/>
-            <a:ext cx="4114800" cy="5440680"/>
+            <a:ext cx="4114800" cy="3886200"/>
           </a:xfrm>
           <a:prstGeom prst="rect">
             <a:avLst/>
           </a:prstGeom>
         </p:spPr>
       </p:pic>
-      <p:pic>
+      <p:pic xmlns:a="http://schemas.openxmlformats.org/drawingml/2006/main" xmlns:r="http://schemas.openxmlformats.org/officeDocument/2006/relationships" xmlns:p="http://schemas.openxmlformats.org/presentationml/2006/main">
+        <p:nvPicPr>
+          <p:cNvPr id="6" name="" descr=""/>
+          <p:cNvPicPr>
+            <a:picLocks noGrp="1"/>
+          </p:cNvPicPr>
+          <p:nvPr>
+            <p:ph/>
+          </p:nvPr>
+        </p:nvPicPr>
+        <p:blipFill>
+          <a:blip cstate="print" r:embed="rId3"/>
+          <a:stretch>
+            <a:fillRect/>
+          </a:stretch>
+        </p:blipFill>
+        <p:spPr>
+          <a:xfrm>
+            <a:off x="457200" y="1426464"/>
+            <a:ext cx="4114800" cy="3886200"/>
+          </a:xfrm>
+          <a:prstGeom prst="rect">
+            <a:avLst/>
+          </a:prstGeom>
+        </p:spPr>
+      </p:pic>
+    </p:spTree>
+  </p:cSld>
+  <p:clrMapOvr>
+    <a:masterClrMapping/>
+  </p:clrMapOvr>
+</p:sld>
+</file>
+
+<file path=ppt/slides/slide11.xml><?xml version="1.0" encoding="utf-8"?>
+<p:sld xmlns:a="http://schemas.openxmlformats.org/drawingml/2006/main" xmlns:r="http://schemas.openxmlformats.org/officeDocument/2006/relationships" xmlns:p="http://schemas.openxmlformats.org/presentationml/2006/main">
+  <p:cSld>
+    <p:spTree>
+      <p:nvGrpSpPr>
+        <p:cNvPr id="1" name=""/>
+        <p:cNvGrpSpPr/>
+        <p:nvPr/>
+      </p:nvGrpSpPr>
+      <p:grpSpPr>
+        <a:xfrm>
+          <a:off x="0" y="0"/>
+          <a:ext cx="0" cy="0"/>
+          <a:chOff x="0" y="0"/>
+          <a:chExt cx="0" cy="0"/>
+        </a:xfrm>
+      </p:grpSpPr>
+      <p:sp xmlns:a="http://schemas.openxmlformats.org/drawingml/2006/main" xmlns:r="http://schemas.openxmlformats.org/officeDocument/2006/relationships" xmlns:p="http://schemas.openxmlformats.org/presentationml/2006/main">
+        <p:nvSpPr>
+          <p:cNvPr id="2" name="Title 1"/>
+          <p:cNvSpPr>
+            <a:spLocks noGrp="1"/>
+          </p:cNvSpPr>
+          <p:nvPr>
+            <p:ph type="title"/>
+          </p:nvPr>
+        </p:nvSpPr>
+        <p:spPr>
+          <a:xfrm>
+            <a:off x="457200" y="6283"/>
+            <a:ext cx="8229600" cy="659640"/>
+          </a:xfrm>
+        </p:spPr>
+        <p:txBody>
+          <a:bodyPr/>
+          <a:lstStyle/>
+          <a:p>
+            <a:r>
+              <a:rPr/>
+              <a:t>Comparison HFDDam_over_RDDam</a:t>
+            </a:r>
+          </a:p>
+        </p:txBody>
+      </p:sp>
+      <p:sp xmlns:a="http://schemas.openxmlformats.org/drawingml/2006/main" xmlns:r="http://schemas.openxmlformats.org/officeDocument/2006/relationships" xmlns:p="http://schemas.openxmlformats.org/presentationml/2006/main">
+        <p:nvSpPr>
+          <p:cNvPr id="3" name="Text Placeholder 4"/>
+          <p:cNvSpPr>
+            <a:spLocks noGrp="1"/>
+          </p:cNvSpPr>
+          <p:nvPr>
+            <p:ph type="body" sz="quarter" idx="3"/>
+          </p:nvPr>
+        </p:nvSpPr>
+        <p:spPr>
+          <a:xfrm>
+            <a:off x="4645025" y="782905"/>
+            <a:ext cx="4041775" cy="639762"/>
+          </a:xfrm>
+        </p:spPr>
+        <p:txBody>
+          <a:bodyPr/>
+          <a:lstStyle/>
+          <a:p>
+            <a:r>
+              <a:rPr/>
+              <a:t>Differential FDR&lt;0.25</a:t>
+            </a:r>
+          </a:p>
+        </p:txBody>
+      </p:sp>
+      <p:sp xmlns:a="http://schemas.openxmlformats.org/drawingml/2006/main" xmlns:r="http://schemas.openxmlformats.org/officeDocument/2006/relationships" xmlns:p="http://schemas.openxmlformats.org/presentationml/2006/main">
+        <p:nvSpPr>
+          <p:cNvPr id="4" name="Text Placeholder 2"/>
+          <p:cNvSpPr>
+            <a:spLocks noGrp="1"/>
+          </p:cNvSpPr>
+          <p:nvPr>
+            <p:ph type="body" idx="1"/>
+          </p:nvPr>
+        </p:nvSpPr>
+        <p:spPr>
+          <a:xfrm>
+            <a:off x="457200" y="776118"/>
+            <a:ext cx="4040188" cy="639762"/>
+          </a:xfrm>
+        </p:spPr>
+        <p:txBody>
+          <a:bodyPr/>
+          <a:lstStyle/>
+          <a:p>
+            <a:r>
+              <a:rPr/>
+              <a:t>Complete Set FDR=1</a:t>
+            </a:r>
+          </a:p>
+        </p:txBody>
+      </p:sp>
+      <p:pic xmlns:a="http://schemas.openxmlformats.org/drawingml/2006/main" xmlns:r="http://schemas.openxmlformats.org/officeDocument/2006/relationships" xmlns:p="http://schemas.openxmlformats.org/presentationml/2006/main">
+        <p:nvPicPr>
+          <p:cNvPr id="5" name="" descr=""/>
+          <p:cNvPicPr>
+            <a:picLocks noGrp="1"/>
+          </p:cNvPicPr>
+          <p:nvPr>
+            <p:ph/>
+          </p:nvPr>
+        </p:nvPicPr>
+        <p:blipFill>
+          <a:blip cstate="print" r:embed="rId2"/>
+          <a:stretch>
+            <a:fillRect/>
+          </a:stretch>
+        </p:blipFill>
+        <p:spPr>
+          <a:xfrm>
+            <a:off x="4645152" y="1426464"/>
+            <a:ext cx="4114800" cy="5440680"/>
+          </a:xfrm>
+          <a:prstGeom prst="rect">
+            <a:avLst/>
+          </a:prstGeom>
+        </p:spPr>
+      </p:pic>
+      <p:pic xmlns:a="http://schemas.openxmlformats.org/drawingml/2006/main" xmlns:r="http://schemas.openxmlformats.org/officeDocument/2006/relationships" xmlns:p="http://schemas.openxmlformats.org/presentationml/2006/main">
+        <p:nvPicPr>
+          <p:cNvPr id="6" name="" descr=""/>
+          <p:cNvPicPr>
+            <a:picLocks noGrp="1"/>
+          </p:cNvPicPr>
+          <p:nvPr>
+            <p:ph/>
+          </p:nvPr>
+        </p:nvPicPr>
+        <p:blipFill>
+          <a:blip cstate="print" r:embed="rId3"/>
+          <a:stretch>
+            <a:fillRect/>
+          </a:stretch>
+        </p:blipFill>
+        <p:spPr>
+          <a:xfrm>
+            <a:off x="457200" y="1426464"/>
+            <a:ext cx="4114800" cy="5440680"/>
+          </a:xfrm>
+          <a:prstGeom prst="rect">
+            <a:avLst/>
+          </a:prstGeom>
+        </p:spPr>
+      </p:pic>
+    </p:spTree>
+  </p:cSld>
+  <p:clrMapOvr>
+    <a:masterClrMapping/>
+  </p:clrMapOvr>
+</p:sld>
+</file>
+
+<file path=ppt/slides/slide12.xml><?xml version="1.0" encoding="utf-8"?>
+<p:sld xmlns:a="http://schemas.openxmlformats.org/drawingml/2006/main" xmlns:r="http://schemas.openxmlformats.org/officeDocument/2006/relationships" xmlns:p="http://schemas.openxmlformats.org/presentationml/2006/main">
+  <p:cSld>
+    <p:spTree>
+      <p:nvGrpSpPr>
+        <p:cNvPr id="1" name=""/>
+        <p:cNvGrpSpPr/>
+        <p:nvPr/>
+      </p:nvGrpSpPr>
+      <p:grpSpPr>
+        <a:xfrm>
+          <a:off x="0" y="0"/>
+          <a:ext cx="0" cy="0"/>
+          <a:chOff x="0" y="0"/>
+          <a:chExt cx="0" cy="0"/>
+        </a:xfrm>
+      </p:grpSpPr>
+      <p:sp xmlns:a="http://schemas.openxmlformats.org/drawingml/2006/main" xmlns:r="http://schemas.openxmlformats.org/officeDocument/2006/relationships" xmlns:p="http://schemas.openxmlformats.org/presentationml/2006/main">
+        <p:nvSpPr>
+          <p:cNvPr id="2" name="Title 1"/>
+          <p:cNvSpPr>
+            <a:spLocks noGrp="1"/>
+          </p:cNvSpPr>
+          <p:nvPr>
+            <p:ph type="title"/>
+          </p:nvPr>
+        </p:nvSpPr>
+        <p:spPr>
+          <a:xfrm>
+            <a:off x="457200" y="6283"/>
+            <a:ext cx="8229600" cy="659640"/>
+          </a:xfrm>
+        </p:spPr>
+        <p:txBody>
+          <a:bodyPr/>
+          <a:lstStyle/>
+          <a:p>
+            <a:r>
+              <a:rPr/>
+              <a:t>Comparison MaleMHFD_over_MaleMRD</a:t>
+            </a:r>
+          </a:p>
+        </p:txBody>
+      </p:sp>
+      <p:sp xmlns:a="http://schemas.openxmlformats.org/drawingml/2006/main" xmlns:r="http://schemas.openxmlformats.org/officeDocument/2006/relationships" xmlns:p="http://schemas.openxmlformats.org/presentationml/2006/main">
+        <p:nvSpPr>
+          <p:cNvPr id="3" name="Text Placeholder 4"/>
+          <p:cNvSpPr>
+            <a:spLocks noGrp="1"/>
+          </p:cNvSpPr>
+          <p:nvPr>
+            <p:ph type="body" sz="quarter" idx="3"/>
+          </p:nvPr>
+        </p:nvSpPr>
+        <p:spPr>
+          <a:xfrm>
+            <a:off x="4645025" y="782905"/>
+            <a:ext cx="4041775" cy="639762"/>
+          </a:xfrm>
+        </p:spPr>
+        <p:txBody>
+          <a:bodyPr/>
+          <a:lstStyle/>
+          <a:p>
+            <a:r>
+              <a:rPr/>
+              <a:t>Differential FDR&lt;0.25</a:t>
+            </a:r>
+          </a:p>
+        </p:txBody>
+      </p:sp>
+      <p:sp xmlns:a="http://schemas.openxmlformats.org/drawingml/2006/main" xmlns:r="http://schemas.openxmlformats.org/officeDocument/2006/relationships" xmlns:p="http://schemas.openxmlformats.org/presentationml/2006/main">
+        <p:nvSpPr>
+          <p:cNvPr id="4" name="Text Placeholder 2"/>
+          <p:cNvSpPr>
+            <a:spLocks noGrp="1"/>
+          </p:cNvSpPr>
+          <p:nvPr>
+            <p:ph type="body" idx="1"/>
+          </p:nvPr>
+        </p:nvSpPr>
+        <p:spPr>
+          <a:xfrm>
+            <a:off x="457200" y="776118"/>
+            <a:ext cx="4040188" cy="639762"/>
+          </a:xfrm>
+        </p:spPr>
+        <p:txBody>
+          <a:bodyPr/>
+          <a:lstStyle/>
+          <a:p>
+            <a:r>
+              <a:rPr/>
+              <a:t>Complete Set FDR=1</a:t>
+            </a:r>
+          </a:p>
+        </p:txBody>
+      </p:sp>
+      <p:pic xmlns:a="http://schemas.openxmlformats.org/drawingml/2006/main" xmlns:r="http://schemas.openxmlformats.org/officeDocument/2006/relationships" xmlns:p="http://schemas.openxmlformats.org/presentationml/2006/main">
+        <p:nvPicPr>
+          <p:cNvPr id="5" name="" descr=""/>
+          <p:cNvPicPr>
+            <a:picLocks noGrp="1"/>
+          </p:cNvPicPr>
+          <p:nvPr>
+            <p:ph/>
+          </p:nvPr>
+        </p:nvPicPr>
+        <p:blipFill>
+          <a:blip cstate="print" r:embed="rId2"/>
+          <a:stretch>
+            <a:fillRect/>
+          </a:stretch>
+        </p:blipFill>
+        <p:spPr>
+          <a:xfrm>
+            <a:off x="4645152" y="1426464"/>
+            <a:ext cx="4114800" cy="5440680"/>
+          </a:xfrm>
+          <a:prstGeom prst="rect">
+            <a:avLst/>
+          </a:prstGeom>
+        </p:spPr>
+      </p:pic>
+      <p:pic xmlns:a="http://schemas.openxmlformats.org/drawingml/2006/main" xmlns:r="http://schemas.openxmlformats.org/officeDocument/2006/relationships" xmlns:p="http://schemas.openxmlformats.org/presentationml/2006/main">
+        <p:nvPicPr>
+          <p:cNvPr id="6" name="" descr=""/>
+          <p:cNvPicPr>
+            <a:picLocks noGrp="1"/>
+          </p:cNvPicPr>
+          <p:nvPr>
+            <p:ph/>
+          </p:nvPr>
+        </p:nvPicPr>
+        <p:blipFill>
+          <a:blip cstate="print" r:embed="rId3"/>
+          <a:stretch>
+            <a:fillRect/>
+          </a:stretch>
+        </p:blipFill>
+        <p:spPr>
+          <a:xfrm>
+            <a:off x="457200" y="1426464"/>
+            <a:ext cx="4114800" cy="5440680"/>
+          </a:xfrm>
+          <a:prstGeom prst="rect">
+            <a:avLst/>
+          </a:prstGeom>
+        </p:spPr>
+      </p:pic>
+    </p:spTree>
+  </p:cSld>
+  <p:clrMapOvr>
+    <a:masterClrMapping/>
+  </p:clrMapOvr>
+</p:sld>
+</file>
+
+<file path=ppt/slides/slide13.xml><?xml version="1.0" encoding="utf-8"?>
+<p:sld xmlns:a="http://schemas.openxmlformats.org/drawingml/2006/main" xmlns:r="http://schemas.openxmlformats.org/officeDocument/2006/relationships" xmlns:p="http://schemas.openxmlformats.org/presentationml/2006/main">
+  <p:cSld>
+    <p:spTree>
+      <p:nvGrpSpPr>
+        <p:cNvPr id="1" name=""/>
+        <p:cNvGrpSpPr/>
+        <p:nvPr/>
+      </p:nvGrpSpPr>
+      <p:grpSpPr>
+        <a:xfrm>
+          <a:off x="0" y="0"/>
+          <a:ext cx="0" cy="0"/>
+          <a:chOff x="0" y="0"/>
+          <a:chExt cx="0" cy="0"/>
+        </a:xfrm>
+      </p:grpSpPr>
+      <p:sp xmlns:a="http://schemas.openxmlformats.org/drawingml/2006/main" xmlns:r="http://schemas.openxmlformats.org/officeDocument/2006/relationships" xmlns:p="http://schemas.openxmlformats.org/presentationml/2006/main">
+        <p:nvSpPr>
+          <p:cNvPr id="2" name="Title 1"/>
+          <p:cNvSpPr>
+            <a:spLocks noGrp="1"/>
+          </p:cNvSpPr>
+          <p:nvPr>
+            <p:ph type="title"/>
+          </p:nvPr>
+        </p:nvSpPr>
+        <p:spPr>
+          <a:xfrm>
+            <a:off x="457200" y="6283"/>
+            <a:ext cx="8229600" cy="659640"/>
+          </a:xfrm>
+        </p:spPr>
+        <p:txBody>
+          <a:bodyPr/>
+          <a:lstStyle/>
+          <a:p>
+            <a:r>
+              <a:rPr/>
+              <a:t>Comparison FemMHFD_over_FemMRD</a:t>
+            </a:r>
+          </a:p>
+        </p:txBody>
+      </p:sp>
+      <p:sp xmlns:a="http://schemas.openxmlformats.org/drawingml/2006/main" xmlns:r="http://schemas.openxmlformats.org/officeDocument/2006/relationships" xmlns:p="http://schemas.openxmlformats.org/presentationml/2006/main">
+        <p:nvSpPr>
+          <p:cNvPr id="3" name="Text Placeholder 4"/>
+          <p:cNvSpPr>
+            <a:spLocks noGrp="1"/>
+          </p:cNvSpPr>
+          <p:nvPr>
+            <p:ph type="body" sz="quarter" idx="3"/>
+          </p:nvPr>
+        </p:nvSpPr>
+        <p:spPr>
+          <a:xfrm>
+            <a:off x="4645025" y="782905"/>
+            <a:ext cx="4041775" cy="639762"/>
+          </a:xfrm>
+        </p:spPr>
+        <p:txBody>
+          <a:bodyPr/>
+          <a:lstStyle/>
+          <a:p>
+            <a:r>
+              <a:rPr/>
+              <a:t>Differential FDR&lt;0.25</a:t>
+            </a:r>
+          </a:p>
+        </p:txBody>
+      </p:sp>
+      <p:sp xmlns:a="http://schemas.openxmlformats.org/drawingml/2006/main" xmlns:r="http://schemas.openxmlformats.org/officeDocument/2006/relationships" xmlns:p="http://schemas.openxmlformats.org/presentationml/2006/main">
+        <p:nvSpPr>
+          <p:cNvPr id="4" name="Text Placeholder 2"/>
+          <p:cNvSpPr>
+            <a:spLocks noGrp="1"/>
+          </p:cNvSpPr>
+          <p:nvPr>
+            <p:ph type="body" idx="1"/>
+          </p:nvPr>
+        </p:nvSpPr>
+        <p:spPr>
+          <a:xfrm>
+            <a:off x="457200" y="776118"/>
+            <a:ext cx="4040188" cy="639762"/>
+          </a:xfrm>
+        </p:spPr>
+        <p:txBody>
+          <a:bodyPr/>
+          <a:lstStyle/>
+          <a:p>
+            <a:r>
+              <a:rPr/>
+              <a:t>Complete Set FDR=1</a:t>
+            </a:r>
+          </a:p>
+        </p:txBody>
+      </p:sp>
+      <p:pic xmlns:a="http://schemas.openxmlformats.org/drawingml/2006/main" xmlns:r="http://schemas.openxmlformats.org/officeDocument/2006/relationships" xmlns:p="http://schemas.openxmlformats.org/presentationml/2006/main">
+        <p:nvPicPr>
+          <p:cNvPr id="5" name="" descr=""/>
+          <p:cNvPicPr>
+            <a:picLocks noGrp="1"/>
+          </p:cNvPicPr>
+          <p:nvPr>
+            <p:ph/>
+          </p:nvPr>
+        </p:nvPicPr>
+        <p:blipFill>
+          <a:blip cstate="print" r:embed="rId2"/>
+          <a:stretch>
+            <a:fillRect/>
+          </a:stretch>
+        </p:blipFill>
+        <p:spPr>
+          <a:xfrm>
+            <a:off x="457200" y="1426464"/>
+            <a:ext cx="4114800" cy="5440680"/>
+          </a:xfrm>
+          <a:prstGeom prst="rect">
+            <a:avLst/>
+          </a:prstGeom>
+        </p:spPr>
+      </p:pic>
+    </p:spTree>
+  </p:cSld>
+  <p:clrMapOvr>
+    <a:masterClrMapping/>
+  </p:clrMapOvr>
+</p:sld>
+</file>
+
+<file path=ppt/slides/slide14.xml><?xml version="1.0" encoding="utf-8"?>
+<p:sld xmlns:a="http://schemas.openxmlformats.org/drawingml/2006/main" xmlns:r="http://schemas.openxmlformats.org/officeDocument/2006/relationships" xmlns:p="http://schemas.openxmlformats.org/presentationml/2006/main">
+  <p:cSld>
+    <p:spTree>
+      <p:nvGrpSpPr>
+        <p:cNvPr id="1" name=""/>
+        <p:cNvGrpSpPr/>
+        <p:nvPr/>
+      </p:nvGrpSpPr>
+      <p:grpSpPr>
+        <a:xfrm>
+          <a:off x="0" y="0"/>
+          <a:ext cx="0" cy="0"/>
+          <a:chOff x="0" y="0"/>
+          <a:chExt cx="0" cy="0"/>
+        </a:xfrm>
+      </p:grpSpPr>
+      <p:sp xmlns:a="http://schemas.openxmlformats.org/drawingml/2006/main" xmlns:r="http://schemas.openxmlformats.org/officeDocument/2006/relationships" xmlns:p="http://schemas.openxmlformats.org/presentationml/2006/main">
+        <p:nvSpPr>
+          <p:cNvPr id="2" name="Title 1"/>
+          <p:cNvSpPr>
+            <a:spLocks noGrp="1"/>
+          </p:cNvSpPr>
+          <p:nvPr>
+            <p:ph type="title"/>
+          </p:nvPr>
+        </p:nvSpPr>
+        <p:spPr>
+          <a:xfrm>
+            <a:off x="457200" y="6283"/>
+            <a:ext cx="8229600" cy="659640"/>
+          </a:xfrm>
+        </p:spPr>
+        <p:txBody>
+          <a:bodyPr/>
+          <a:lstStyle/>
+          <a:p>
+            <a:r>
+              <a:rPr/>
+              <a:t>Comparison MaleMRD_MaleMHFD_FemMRD_FemMHFD</a:t>
+            </a:r>
+          </a:p>
+        </p:txBody>
+      </p:sp>
+      <p:sp xmlns:a="http://schemas.openxmlformats.org/drawingml/2006/main" xmlns:r="http://schemas.openxmlformats.org/officeDocument/2006/relationships" xmlns:p="http://schemas.openxmlformats.org/presentationml/2006/main">
+        <p:nvSpPr>
+          <p:cNvPr id="3" name="Text Placeholder 4"/>
+          <p:cNvSpPr>
+            <a:spLocks noGrp="1"/>
+          </p:cNvSpPr>
+          <p:nvPr>
+            <p:ph type="body" sz="quarter" idx="3"/>
+          </p:nvPr>
+        </p:nvSpPr>
+        <p:spPr>
+          <a:xfrm>
+            <a:off x="4645025" y="782905"/>
+            <a:ext cx="4041775" cy="639762"/>
+          </a:xfrm>
+        </p:spPr>
+        <p:txBody>
+          <a:bodyPr/>
+          <a:lstStyle/>
+          <a:p>
+            <a:r>
+              <a:rPr/>
+              <a:t>Differential FDR&lt;0.25</a:t>
+            </a:r>
+          </a:p>
+        </p:txBody>
+      </p:sp>
+      <p:sp xmlns:a="http://schemas.openxmlformats.org/drawingml/2006/main" xmlns:r="http://schemas.openxmlformats.org/officeDocument/2006/relationships" xmlns:p="http://schemas.openxmlformats.org/presentationml/2006/main">
+        <p:nvSpPr>
+          <p:cNvPr id="4" name="Text Placeholder 2"/>
+          <p:cNvSpPr>
+            <a:spLocks noGrp="1"/>
+          </p:cNvSpPr>
+          <p:nvPr>
+            <p:ph type="body" idx="1"/>
+          </p:nvPr>
+        </p:nvSpPr>
+        <p:spPr>
+          <a:xfrm>
+            <a:off x="457200" y="776118"/>
+            <a:ext cx="4040188" cy="639762"/>
+          </a:xfrm>
+        </p:spPr>
+        <p:txBody>
+          <a:bodyPr/>
+          <a:lstStyle/>
+          <a:p>
+            <a:r>
+              <a:rPr/>
+              <a:t>Complete Set FDR=1</a:t>
+            </a:r>
+          </a:p>
+        </p:txBody>
+      </p:sp>
+      <p:pic xmlns:a="http://schemas.openxmlformats.org/drawingml/2006/main" xmlns:r="http://schemas.openxmlformats.org/officeDocument/2006/relationships" xmlns:p="http://schemas.openxmlformats.org/presentationml/2006/main">
+        <p:nvPicPr>
+          <p:cNvPr id="5" name="" descr=""/>
+          <p:cNvPicPr>
+            <a:picLocks noGrp="1"/>
+          </p:cNvPicPr>
+          <p:nvPr>
+            <p:ph/>
+          </p:nvPr>
+        </p:nvPicPr>
+        <p:blipFill>
+          <a:blip cstate="print" r:embed="rId2"/>
+          <a:stretch>
+            <a:fillRect/>
+          </a:stretch>
+        </p:blipFill>
+        <p:spPr>
+          <a:xfrm>
+            <a:off x="4645152" y="1426464"/>
+            <a:ext cx="4114800" cy="5440680"/>
+          </a:xfrm>
+          <a:prstGeom prst="rect">
+            <a:avLst/>
+          </a:prstGeom>
+        </p:spPr>
+      </p:pic>
+      <p:pic xmlns:a="http://schemas.openxmlformats.org/drawingml/2006/main" xmlns:r="http://schemas.openxmlformats.org/officeDocument/2006/relationships" xmlns:p="http://schemas.openxmlformats.org/presentationml/2006/main">
         <p:nvPicPr>
           <p:cNvPr id="6" name="" descr=""/>
           <p:cNvPicPr>
@@ -2028,7 +2638,7 @@
           <a:chExt cx="0" cy="0"/>
         </a:xfrm>
       </p:grpSpPr>
-      <p:sp>
+      <p:sp xmlns:a="http://schemas.openxmlformats.org/drawingml/2006/main" xmlns:r="http://schemas.openxmlformats.org/officeDocument/2006/relationships" xmlns:p="http://schemas.openxmlformats.org/presentationml/2006/main">
         <p:nvSpPr>
           <p:cNvPr id="2" name="Title 1"/>
           <p:cNvSpPr>
@@ -2055,7 +2665,7 @@
           </a:p>
         </p:txBody>
       </p:sp>
-      <p:sp>
+      <p:sp xmlns:a="http://schemas.openxmlformats.org/drawingml/2006/main" xmlns:r="http://schemas.openxmlformats.org/officeDocument/2006/relationships" xmlns:p="http://schemas.openxmlformats.org/presentationml/2006/main">
         <p:nvSpPr>
           <p:cNvPr id="3" name="Content Placeholder 2"/>
           <p:cNvSpPr>
@@ -2185,7 +2795,7 @@
           <a:chExt cx="0" cy="0"/>
         </a:xfrm>
       </p:grpSpPr>
-      <p:sp>
+      <p:sp xmlns:a="http://schemas.openxmlformats.org/drawingml/2006/main" xmlns:r="http://schemas.openxmlformats.org/officeDocument/2006/relationships" xmlns:p="http://schemas.openxmlformats.org/presentationml/2006/main">
         <p:nvSpPr>
           <p:cNvPr id="2" name="Title 1"/>
           <p:cNvSpPr>
@@ -2212,7 +2822,7 @@
           </a:p>
         </p:txBody>
       </p:sp>
-      <p:pic>
+      <p:pic xmlns:a="http://schemas.openxmlformats.org/drawingml/2006/main" xmlns:r="http://schemas.openxmlformats.org/officeDocument/2006/relationships" xmlns:p="http://schemas.openxmlformats.org/presentationml/2006/main">
         <p:nvPicPr>
           <p:cNvPr id="3" name="" descr=""/>
           <p:cNvPicPr>
@@ -2263,7 +2873,7 @@
           <a:chExt cx="0" cy="0"/>
         </a:xfrm>
       </p:grpSpPr>
-      <p:sp>
+      <p:sp xmlns:a="http://schemas.openxmlformats.org/drawingml/2006/main" xmlns:r="http://schemas.openxmlformats.org/officeDocument/2006/relationships" xmlns:p="http://schemas.openxmlformats.org/presentationml/2006/main">
         <p:nvSpPr>
           <p:cNvPr id="2" name="Title 1"/>
           <p:cNvSpPr>
@@ -2290,7 +2900,7 @@
           </a:p>
         </p:txBody>
       </p:sp>
-      <p:pic>
+      <p:pic xmlns:a="http://schemas.openxmlformats.org/drawingml/2006/main" xmlns:r="http://schemas.openxmlformats.org/officeDocument/2006/relationships" xmlns:p="http://schemas.openxmlformats.org/presentationml/2006/main">
         <p:nvPicPr>
           <p:cNvPr id="3" name="" descr=""/>
           <p:cNvPicPr>
@@ -2341,7 +2951,7 @@
           <a:chExt cx="0" cy="0"/>
         </a:xfrm>
       </p:grpSpPr>
-      <p:sp>
+      <p:sp xmlns:a="http://schemas.openxmlformats.org/drawingml/2006/main" xmlns:r="http://schemas.openxmlformats.org/officeDocument/2006/relationships" xmlns:p="http://schemas.openxmlformats.org/presentationml/2006/main">
         <p:nvSpPr>
           <p:cNvPr id="2" name="Title 1"/>
           <p:cNvSpPr>
@@ -2368,7 +2978,7 @@
           </a:p>
         </p:txBody>
       </p:sp>
-      <p:pic>
+      <p:pic xmlns:a="http://schemas.openxmlformats.org/drawingml/2006/main" xmlns:r="http://schemas.openxmlformats.org/officeDocument/2006/relationships" xmlns:p="http://schemas.openxmlformats.org/presentationml/2006/main">
         <p:nvPicPr>
           <p:cNvPr id="3" name="" descr=""/>
           <p:cNvPicPr>
@@ -2419,7 +3029,7 @@
           <a:chExt cx="0" cy="0"/>
         </a:xfrm>
       </p:grpSpPr>
-      <p:sp>
+      <p:sp xmlns:a="http://schemas.openxmlformats.org/drawingml/2006/main" xmlns:r="http://schemas.openxmlformats.org/officeDocument/2006/relationships" xmlns:p="http://schemas.openxmlformats.org/presentationml/2006/main">
         <p:nvSpPr>
           <p:cNvPr id="2" name="Title 1"/>
           <p:cNvSpPr>
@@ -2446,7 +3056,7 @@
           </a:p>
         </p:txBody>
       </p:sp>
-      <p:pic>
+      <p:pic xmlns:a="http://schemas.openxmlformats.org/drawingml/2006/main" xmlns:r="http://schemas.openxmlformats.org/officeDocument/2006/relationships" xmlns:p="http://schemas.openxmlformats.org/presentationml/2006/main">
         <p:nvPicPr>
           <p:cNvPr id="3" name="" descr=""/>
           <p:cNvPicPr>
@@ -2497,7 +3107,7 @@
           <a:chExt cx="0" cy="0"/>
         </a:xfrm>
       </p:grpSpPr>
-      <p:sp>
+      <p:sp xmlns:a="http://schemas.openxmlformats.org/drawingml/2006/main" xmlns:r="http://schemas.openxmlformats.org/officeDocument/2006/relationships" xmlns:p="http://schemas.openxmlformats.org/presentationml/2006/main">
         <p:nvSpPr>
           <p:cNvPr id="2" name="Title 1"/>
           <p:cNvSpPr>
@@ -2524,7 +3134,7 @@
           </a:p>
         </p:txBody>
       </p:sp>
-      <p:sp>
+      <p:sp xmlns:a="http://schemas.openxmlformats.org/drawingml/2006/main" xmlns:r="http://schemas.openxmlformats.org/officeDocument/2006/relationships" xmlns:p="http://schemas.openxmlformats.org/presentationml/2006/main">
         <p:nvSpPr>
           <p:cNvPr id="3" name="Text Placeholder 4"/>
           <p:cNvSpPr>
@@ -2546,12 +3156,12 @@
           <a:p>
             <a:r>
               <a:rPr/>
-              <a:t>Differential FDR&lt;0.25</a:t>
-            </a:r>
-          </a:p>
-        </p:txBody>
-      </p:sp>
-      <p:sp>
+              <a:t>Normalized PCA</a:t>
+            </a:r>
+          </a:p>
+        </p:txBody>
+      </p:sp>
+      <p:sp xmlns:a="http://schemas.openxmlformats.org/drawingml/2006/main" xmlns:r="http://schemas.openxmlformats.org/officeDocument/2006/relationships" xmlns:p="http://schemas.openxmlformats.org/presentationml/2006/main">
         <p:nvSpPr>
           <p:cNvPr id="4" name="Text Placeholder 2"/>
           <p:cNvSpPr>
@@ -2573,12 +3183,12 @@
           <a:p>
             <a:r>
               <a:rPr/>
-              <a:t>Complete Set FDR=1</a:t>
-            </a:r>
-          </a:p>
-        </p:txBody>
-      </p:sp>
-      <p:pic>
+              <a:t>Raw PCA</a:t>
+            </a:r>
+          </a:p>
+        </p:txBody>
+      </p:sp>
+      <p:pic xmlns:a="http://schemas.openxmlformats.org/drawingml/2006/main" xmlns:r="http://schemas.openxmlformats.org/officeDocument/2006/relationships" xmlns:p="http://schemas.openxmlformats.org/presentationml/2006/main">
         <p:nvPicPr>
           <p:cNvPr id="5" name="" descr=""/>
           <p:cNvPicPr>
@@ -2597,14 +3207,14 @@
         <p:spPr>
           <a:xfrm>
             <a:off x="4645152" y="1426464"/>
-            <a:ext cx="4114800" cy="5440680"/>
+            <a:ext cx="4114800" cy="3886200"/>
           </a:xfrm>
           <a:prstGeom prst="rect">
             <a:avLst/>
           </a:prstGeom>
         </p:spPr>
       </p:pic>
-      <p:pic>
+      <p:pic xmlns:a="http://schemas.openxmlformats.org/drawingml/2006/main" xmlns:r="http://schemas.openxmlformats.org/officeDocument/2006/relationships" xmlns:p="http://schemas.openxmlformats.org/presentationml/2006/main">
         <p:nvPicPr>
           <p:cNvPr id="6" name="" descr=""/>
           <p:cNvPicPr>
@@ -2623,7 +3233,7 @@
         <p:spPr>
           <a:xfrm>
             <a:off x="457200" y="1426464"/>
-            <a:ext cx="4114800" cy="5440680"/>
+            <a:ext cx="4114800" cy="3886200"/>
           </a:xfrm>
           <a:prstGeom prst="rect">
             <a:avLst/>
@@ -2655,7 +3265,7 @@
           <a:chExt cx="0" cy="0"/>
         </a:xfrm>
       </p:grpSpPr>
-      <p:sp>
+      <p:sp xmlns:a="http://schemas.openxmlformats.org/drawingml/2006/main" xmlns:r="http://schemas.openxmlformats.org/officeDocument/2006/relationships" xmlns:p="http://schemas.openxmlformats.org/presentationml/2006/main">
         <p:nvSpPr>
           <p:cNvPr id="2" name="Title 1"/>
           <p:cNvSpPr>
@@ -2682,7 +3292,7 @@
           </a:p>
         </p:txBody>
       </p:sp>
-      <p:sp>
+      <p:sp xmlns:a="http://schemas.openxmlformats.org/drawingml/2006/main" xmlns:r="http://schemas.openxmlformats.org/officeDocument/2006/relationships" xmlns:p="http://schemas.openxmlformats.org/presentationml/2006/main">
         <p:nvSpPr>
           <p:cNvPr id="3" name="Text Placeholder 4"/>
           <p:cNvSpPr>
@@ -2704,12 +3314,12 @@
           <a:p>
             <a:r>
               <a:rPr/>
-              <a:t>Differential FDR&lt;0.25</a:t>
-            </a:r>
-          </a:p>
-        </p:txBody>
-      </p:sp>
-      <p:sp>
+              <a:t>Normalized PCA</a:t>
+            </a:r>
+          </a:p>
+        </p:txBody>
+      </p:sp>
+      <p:sp xmlns:a="http://schemas.openxmlformats.org/drawingml/2006/main" xmlns:r="http://schemas.openxmlformats.org/officeDocument/2006/relationships" xmlns:p="http://schemas.openxmlformats.org/presentationml/2006/main">
         <p:nvSpPr>
           <p:cNvPr id="4" name="Text Placeholder 2"/>
           <p:cNvSpPr>
@@ -2731,12 +3341,12 @@
           <a:p>
             <a:r>
               <a:rPr/>
-              <a:t>Complete Set FDR=1</a:t>
-            </a:r>
-          </a:p>
-        </p:txBody>
-      </p:sp>
-      <p:pic>
+              <a:t>Raw PCA</a:t>
+            </a:r>
+          </a:p>
+        </p:txBody>
+      </p:sp>
+      <p:pic xmlns:a="http://schemas.openxmlformats.org/drawingml/2006/main" xmlns:r="http://schemas.openxmlformats.org/officeDocument/2006/relationships" xmlns:p="http://schemas.openxmlformats.org/presentationml/2006/main">
         <p:nvPicPr>
           <p:cNvPr id="5" name="" descr=""/>
           <p:cNvPicPr>
@@ -2755,14 +3365,14 @@
         <p:spPr>
           <a:xfrm>
             <a:off x="4645152" y="1426464"/>
-            <a:ext cx="4114800" cy="5440680"/>
+            <a:ext cx="4114800" cy="3886200"/>
           </a:xfrm>
           <a:prstGeom prst="rect">
             <a:avLst/>
           </a:prstGeom>
         </p:spPr>
       </p:pic>
-      <p:pic>
+      <p:pic xmlns:a="http://schemas.openxmlformats.org/drawingml/2006/main" xmlns:r="http://schemas.openxmlformats.org/officeDocument/2006/relationships" xmlns:p="http://schemas.openxmlformats.org/presentationml/2006/main">
         <p:nvPicPr>
           <p:cNvPr id="6" name="" descr=""/>
           <p:cNvPicPr>
@@ -2781,7 +3391,7 @@
         <p:spPr>
           <a:xfrm>
             <a:off x="457200" y="1426464"/>
-            <a:ext cx="4114800" cy="5440680"/>
+            <a:ext cx="4114800" cy="3886200"/>
           </a:xfrm>
           <a:prstGeom prst="rect">
             <a:avLst/>
@@ -2813,7 +3423,7 @@
           <a:chExt cx="0" cy="0"/>
         </a:xfrm>
       </p:grpSpPr>
-      <p:sp>
+      <p:sp xmlns:a="http://schemas.openxmlformats.org/drawingml/2006/main" xmlns:r="http://schemas.openxmlformats.org/officeDocument/2006/relationships" xmlns:p="http://schemas.openxmlformats.org/presentationml/2006/main">
         <p:nvSpPr>
           <p:cNvPr id="2" name="Title 1"/>
           <p:cNvSpPr>
@@ -2840,7 +3450,7 @@
           </a:p>
         </p:txBody>
       </p:sp>
-      <p:sp>
+      <p:sp xmlns:a="http://schemas.openxmlformats.org/drawingml/2006/main" xmlns:r="http://schemas.openxmlformats.org/officeDocument/2006/relationships" xmlns:p="http://schemas.openxmlformats.org/presentationml/2006/main">
         <p:nvSpPr>
           <p:cNvPr id="3" name="Text Placeholder 4"/>
           <p:cNvSpPr>
@@ -2862,12 +3472,12 @@
           <a:p>
             <a:r>
               <a:rPr/>
-              <a:t>Differential FDR&lt;0.25</a:t>
-            </a:r>
-          </a:p>
-        </p:txBody>
-      </p:sp>
-      <p:sp>
+              <a:t>Normalized PCA</a:t>
+            </a:r>
+          </a:p>
+        </p:txBody>
+      </p:sp>
+      <p:sp xmlns:a="http://schemas.openxmlformats.org/drawingml/2006/main" xmlns:r="http://schemas.openxmlformats.org/officeDocument/2006/relationships" xmlns:p="http://schemas.openxmlformats.org/presentationml/2006/main">
         <p:nvSpPr>
           <p:cNvPr id="4" name="Text Placeholder 2"/>
           <p:cNvSpPr>
@@ -2889,12 +3499,12 @@
           <a:p>
             <a:r>
               <a:rPr/>
-              <a:t>Complete Set FDR=1</a:t>
-            </a:r>
-          </a:p>
-        </p:txBody>
-      </p:sp>
-      <p:pic>
+              <a:t>Raw PCA</a:t>
+            </a:r>
+          </a:p>
+        </p:txBody>
+      </p:sp>
+      <p:pic xmlns:a="http://schemas.openxmlformats.org/drawingml/2006/main" xmlns:r="http://schemas.openxmlformats.org/officeDocument/2006/relationships" xmlns:p="http://schemas.openxmlformats.org/presentationml/2006/main">
         <p:nvPicPr>
           <p:cNvPr id="5" name="" descr=""/>
           <p:cNvPicPr>
@@ -2912,8 +3522,34 @@
         </p:blipFill>
         <p:spPr>
           <a:xfrm>
+            <a:off x="4645152" y="1426464"/>
+            <a:ext cx="4114800" cy="3886200"/>
+          </a:xfrm>
+          <a:prstGeom prst="rect">
+            <a:avLst/>
+          </a:prstGeom>
+        </p:spPr>
+      </p:pic>
+      <p:pic xmlns:a="http://schemas.openxmlformats.org/drawingml/2006/main" xmlns:r="http://schemas.openxmlformats.org/officeDocument/2006/relationships" xmlns:p="http://schemas.openxmlformats.org/presentationml/2006/main">
+        <p:nvPicPr>
+          <p:cNvPr id="6" name="" descr=""/>
+          <p:cNvPicPr>
+            <a:picLocks noGrp="1"/>
+          </p:cNvPicPr>
+          <p:nvPr>
+            <p:ph/>
+          </p:nvPr>
+        </p:nvPicPr>
+        <p:blipFill>
+          <a:blip cstate="print" r:embed="rId3"/>
+          <a:stretch>
+            <a:fillRect/>
+          </a:stretch>
+        </p:blipFill>
+        <p:spPr>
+          <a:xfrm>
             <a:off x="457200" y="1426464"/>
-            <a:ext cx="4114800" cy="5440680"/>
+            <a:ext cx="4114800" cy="3886200"/>
           </a:xfrm>
           <a:prstGeom prst="rect">
             <a:avLst/>

--- a/example2-prenormalized-dummy/results/report.pptx
+++ b/example2-prenormalized-dummy/results/report.pptx
@@ -10,7 +10,7 @@
   <p:handoutMasterIdLst>
     <p:handoutMasterId r:id="rId3"/>
   </p:handoutMasterIdLst>
-  <p:sldIdLst xmlns:a="http://schemas.openxmlformats.org/drawingml/2006/main" xmlns:r="http://schemas.openxmlformats.org/officeDocument/2006/relationships" xmlns:p="http://schemas.openxmlformats.org/presentationml/2006/main">
+  <p:sldIdLst>
     <p:sldId id="256" r:id="rId8"/>
     <p:sldId id="257" r:id="rId9"/>
     <p:sldId id="258" r:id="rId10"/>
@@ -1795,7 +1795,7 @@
           <a:chExt cx="0" cy="0"/>
         </a:xfrm>
       </p:grpSpPr>
-      <p:sp xmlns:a="http://schemas.openxmlformats.org/drawingml/2006/main" xmlns:r="http://schemas.openxmlformats.org/officeDocument/2006/relationships" xmlns:p="http://schemas.openxmlformats.org/presentationml/2006/main">
+      <p:sp>
         <p:nvSpPr>
           <p:cNvPr id="2" name="Title 1"/>
           <p:cNvSpPr>
@@ -1822,7 +1822,7 @@
           </a:p>
         </p:txBody>
       </p:sp>
-      <p:sp xmlns:a="http://schemas.openxmlformats.org/drawingml/2006/main" xmlns:r="http://schemas.openxmlformats.org/officeDocument/2006/relationships" xmlns:p="http://schemas.openxmlformats.org/presentationml/2006/main">
+      <p:sp>
         <p:nvSpPr>
           <p:cNvPr id="3" name="Subtitle 2"/>
           <p:cNvSpPr>
@@ -1874,7 +1874,7 @@
           <a:chExt cx="0" cy="0"/>
         </a:xfrm>
       </p:grpSpPr>
-      <p:sp xmlns:a="http://schemas.openxmlformats.org/drawingml/2006/main" xmlns:r="http://schemas.openxmlformats.org/officeDocument/2006/relationships" xmlns:p="http://schemas.openxmlformats.org/presentationml/2006/main">
+      <p:sp>
         <p:nvSpPr>
           <p:cNvPr id="2" name="Title 1"/>
           <p:cNvSpPr>
@@ -1901,7 +1901,7 @@
           </a:p>
         </p:txBody>
       </p:sp>
-      <p:sp xmlns:a="http://schemas.openxmlformats.org/drawingml/2006/main" xmlns:r="http://schemas.openxmlformats.org/officeDocument/2006/relationships" xmlns:p="http://schemas.openxmlformats.org/presentationml/2006/main">
+      <p:sp>
         <p:nvSpPr>
           <p:cNvPr id="3" name="Text Placeholder 4"/>
           <p:cNvSpPr>
@@ -1928,7 +1928,7 @@
           </a:p>
         </p:txBody>
       </p:sp>
-      <p:sp xmlns:a="http://schemas.openxmlformats.org/drawingml/2006/main" xmlns:r="http://schemas.openxmlformats.org/officeDocument/2006/relationships" xmlns:p="http://schemas.openxmlformats.org/presentationml/2006/main">
+      <p:sp>
         <p:nvSpPr>
           <p:cNvPr id="4" name="Text Placeholder 2"/>
           <p:cNvSpPr>
@@ -1955,7 +1955,7 @@
           </a:p>
         </p:txBody>
       </p:sp>
-      <p:pic xmlns:a="http://schemas.openxmlformats.org/drawingml/2006/main" xmlns:r="http://schemas.openxmlformats.org/officeDocument/2006/relationships" xmlns:p="http://schemas.openxmlformats.org/presentationml/2006/main">
+      <p:pic>
         <p:nvPicPr>
           <p:cNvPr id="5" name="" descr=""/>
           <p:cNvPicPr>
@@ -1981,7 +1981,7 @@
           </a:prstGeom>
         </p:spPr>
       </p:pic>
-      <p:pic xmlns:a="http://schemas.openxmlformats.org/drawingml/2006/main" xmlns:r="http://schemas.openxmlformats.org/officeDocument/2006/relationships" xmlns:p="http://schemas.openxmlformats.org/presentationml/2006/main">
+      <p:pic>
         <p:nvPicPr>
           <p:cNvPr id="6" name="" descr=""/>
           <p:cNvPicPr>
@@ -1992,7 +1992,7 @@
           </p:nvPr>
         </p:nvPicPr>
         <p:blipFill>
-          <a:blip cstate="print" r:embed="rId3"/>
+          <a:blip cstate="print" r:embed="rId2"/>
           <a:stretch>
             <a:fillRect/>
           </a:stretch>
@@ -2032,7 +2032,7 @@
           <a:chExt cx="0" cy="0"/>
         </a:xfrm>
       </p:grpSpPr>
-      <p:sp xmlns:a="http://schemas.openxmlformats.org/drawingml/2006/main" xmlns:r="http://schemas.openxmlformats.org/officeDocument/2006/relationships" xmlns:p="http://schemas.openxmlformats.org/presentationml/2006/main">
+      <p:sp>
         <p:nvSpPr>
           <p:cNvPr id="2" name="Title 1"/>
           <p:cNvSpPr>
@@ -2059,7 +2059,7 @@
           </a:p>
         </p:txBody>
       </p:sp>
-      <p:sp xmlns:a="http://schemas.openxmlformats.org/drawingml/2006/main" xmlns:r="http://schemas.openxmlformats.org/officeDocument/2006/relationships" xmlns:p="http://schemas.openxmlformats.org/presentationml/2006/main">
+      <p:sp>
         <p:nvSpPr>
           <p:cNvPr id="3" name="Text Placeholder 4"/>
           <p:cNvSpPr>
@@ -2081,12 +2081,12 @@
           <a:p>
             <a:r>
               <a:rPr/>
-              <a:t>Differential FDR&lt;0.25</a:t>
-            </a:r>
-          </a:p>
-        </p:txBody>
-      </p:sp>
-      <p:sp xmlns:a="http://schemas.openxmlformats.org/drawingml/2006/main" xmlns:r="http://schemas.openxmlformats.org/officeDocument/2006/relationships" xmlns:p="http://schemas.openxmlformats.org/presentationml/2006/main">
+              <a:t>Differential fdr&lt;0.25</a:t>
+            </a:r>
+          </a:p>
+        </p:txBody>
+      </p:sp>
+      <p:sp>
         <p:nvSpPr>
           <p:cNvPr id="4" name="Text Placeholder 2"/>
           <p:cNvSpPr>
@@ -2108,12 +2108,12 @@
           <a:p>
             <a:r>
               <a:rPr/>
-              <a:t>Complete Set FDR=1</a:t>
-            </a:r>
-          </a:p>
-        </p:txBody>
-      </p:sp>
-      <p:pic xmlns:a="http://schemas.openxmlformats.org/drawingml/2006/main" xmlns:r="http://schemas.openxmlformats.org/officeDocument/2006/relationships" xmlns:p="http://schemas.openxmlformats.org/presentationml/2006/main">
+              <a:t>Complete Set fdr=1</a:t>
+            </a:r>
+          </a:p>
+        </p:txBody>
+      </p:sp>
+      <p:pic>
         <p:nvPicPr>
           <p:cNvPr id="5" name="" descr=""/>
           <p:cNvPicPr>
@@ -2139,7 +2139,7 @@
           </a:prstGeom>
         </p:spPr>
       </p:pic>
-      <p:pic xmlns:a="http://schemas.openxmlformats.org/drawingml/2006/main" xmlns:r="http://schemas.openxmlformats.org/officeDocument/2006/relationships" xmlns:p="http://schemas.openxmlformats.org/presentationml/2006/main">
+      <p:pic>
         <p:nvPicPr>
           <p:cNvPr id="6" name="" descr=""/>
           <p:cNvPicPr>
@@ -2190,7 +2190,7 @@
           <a:chExt cx="0" cy="0"/>
         </a:xfrm>
       </p:grpSpPr>
-      <p:sp xmlns:a="http://schemas.openxmlformats.org/drawingml/2006/main" xmlns:r="http://schemas.openxmlformats.org/officeDocument/2006/relationships" xmlns:p="http://schemas.openxmlformats.org/presentationml/2006/main">
+      <p:sp>
         <p:nvSpPr>
           <p:cNvPr id="2" name="Title 1"/>
           <p:cNvSpPr>
@@ -2217,7 +2217,7 @@
           </a:p>
         </p:txBody>
       </p:sp>
-      <p:sp xmlns:a="http://schemas.openxmlformats.org/drawingml/2006/main" xmlns:r="http://schemas.openxmlformats.org/officeDocument/2006/relationships" xmlns:p="http://schemas.openxmlformats.org/presentationml/2006/main">
+      <p:sp>
         <p:nvSpPr>
           <p:cNvPr id="3" name="Text Placeholder 4"/>
           <p:cNvSpPr>
@@ -2239,12 +2239,12 @@
           <a:p>
             <a:r>
               <a:rPr/>
-              <a:t>Differential FDR&lt;0.25</a:t>
-            </a:r>
-          </a:p>
-        </p:txBody>
-      </p:sp>
-      <p:sp xmlns:a="http://schemas.openxmlformats.org/drawingml/2006/main" xmlns:r="http://schemas.openxmlformats.org/officeDocument/2006/relationships" xmlns:p="http://schemas.openxmlformats.org/presentationml/2006/main">
+              <a:t>Differential fdr&lt;0.25</a:t>
+            </a:r>
+          </a:p>
+        </p:txBody>
+      </p:sp>
+      <p:sp>
         <p:nvSpPr>
           <p:cNvPr id="4" name="Text Placeholder 2"/>
           <p:cNvSpPr>
@@ -2266,12 +2266,12 @@
           <a:p>
             <a:r>
               <a:rPr/>
-              <a:t>Complete Set FDR=1</a:t>
-            </a:r>
-          </a:p>
-        </p:txBody>
-      </p:sp>
-      <p:pic xmlns:a="http://schemas.openxmlformats.org/drawingml/2006/main" xmlns:r="http://schemas.openxmlformats.org/officeDocument/2006/relationships" xmlns:p="http://schemas.openxmlformats.org/presentationml/2006/main">
+              <a:t>Complete Set fdr=1</a:t>
+            </a:r>
+          </a:p>
+        </p:txBody>
+      </p:sp>
+      <p:pic>
         <p:nvPicPr>
           <p:cNvPr id="5" name="" descr=""/>
           <p:cNvPicPr>
@@ -2297,7 +2297,7 @@
           </a:prstGeom>
         </p:spPr>
       </p:pic>
-      <p:pic xmlns:a="http://schemas.openxmlformats.org/drawingml/2006/main" xmlns:r="http://schemas.openxmlformats.org/officeDocument/2006/relationships" xmlns:p="http://schemas.openxmlformats.org/presentationml/2006/main">
+      <p:pic>
         <p:nvPicPr>
           <p:cNvPr id="6" name="" descr=""/>
           <p:cNvPicPr>
@@ -2348,7 +2348,7 @@
           <a:chExt cx="0" cy="0"/>
         </a:xfrm>
       </p:grpSpPr>
-      <p:sp xmlns:a="http://schemas.openxmlformats.org/drawingml/2006/main" xmlns:r="http://schemas.openxmlformats.org/officeDocument/2006/relationships" xmlns:p="http://schemas.openxmlformats.org/presentationml/2006/main">
+      <p:sp>
         <p:nvSpPr>
           <p:cNvPr id="2" name="Title 1"/>
           <p:cNvSpPr>
@@ -2375,7 +2375,7 @@
           </a:p>
         </p:txBody>
       </p:sp>
-      <p:sp xmlns:a="http://schemas.openxmlformats.org/drawingml/2006/main" xmlns:r="http://schemas.openxmlformats.org/officeDocument/2006/relationships" xmlns:p="http://schemas.openxmlformats.org/presentationml/2006/main">
+      <p:sp>
         <p:nvSpPr>
           <p:cNvPr id="3" name="Text Placeholder 4"/>
           <p:cNvSpPr>
@@ -2397,12 +2397,12 @@
           <a:p>
             <a:r>
               <a:rPr/>
-              <a:t>Differential FDR&lt;0.25</a:t>
-            </a:r>
-          </a:p>
-        </p:txBody>
-      </p:sp>
-      <p:sp xmlns:a="http://schemas.openxmlformats.org/drawingml/2006/main" xmlns:r="http://schemas.openxmlformats.org/officeDocument/2006/relationships" xmlns:p="http://schemas.openxmlformats.org/presentationml/2006/main">
+              <a:t>Differential fdr&lt;0.25</a:t>
+            </a:r>
+          </a:p>
+        </p:txBody>
+      </p:sp>
+      <p:sp>
         <p:nvSpPr>
           <p:cNvPr id="4" name="Text Placeholder 2"/>
           <p:cNvSpPr>
@@ -2424,12 +2424,12 @@
           <a:p>
             <a:r>
               <a:rPr/>
-              <a:t>Complete Set FDR=1</a:t>
-            </a:r>
-          </a:p>
-        </p:txBody>
-      </p:sp>
-      <p:pic xmlns:a="http://schemas.openxmlformats.org/drawingml/2006/main" xmlns:r="http://schemas.openxmlformats.org/officeDocument/2006/relationships" xmlns:p="http://schemas.openxmlformats.org/presentationml/2006/main">
+              <a:t>Complete Set fdr=1</a:t>
+            </a:r>
+          </a:p>
+        </p:txBody>
+      </p:sp>
+      <p:pic>
         <p:nvPicPr>
           <p:cNvPr id="5" name="" descr=""/>
           <p:cNvPicPr>
@@ -2480,7 +2480,7 @@
           <a:chExt cx="0" cy="0"/>
         </a:xfrm>
       </p:grpSpPr>
-      <p:sp xmlns:a="http://schemas.openxmlformats.org/drawingml/2006/main" xmlns:r="http://schemas.openxmlformats.org/officeDocument/2006/relationships" xmlns:p="http://schemas.openxmlformats.org/presentationml/2006/main">
+      <p:sp>
         <p:nvSpPr>
           <p:cNvPr id="2" name="Title 1"/>
           <p:cNvSpPr>
@@ -2507,7 +2507,7 @@
           </a:p>
         </p:txBody>
       </p:sp>
-      <p:sp xmlns:a="http://schemas.openxmlformats.org/drawingml/2006/main" xmlns:r="http://schemas.openxmlformats.org/officeDocument/2006/relationships" xmlns:p="http://schemas.openxmlformats.org/presentationml/2006/main">
+      <p:sp>
         <p:nvSpPr>
           <p:cNvPr id="3" name="Text Placeholder 4"/>
           <p:cNvSpPr>
@@ -2529,12 +2529,12 @@
           <a:p>
             <a:r>
               <a:rPr/>
-              <a:t>Differential FDR&lt;0.25</a:t>
-            </a:r>
-          </a:p>
-        </p:txBody>
-      </p:sp>
-      <p:sp xmlns:a="http://schemas.openxmlformats.org/drawingml/2006/main" xmlns:r="http://schemas.openxmlformats.org/officeDocument/2006/relationships" xmlns:p="http://schemas.openxmlformats.org/presentationml/2006/main">
+              <a:t>Differential fdr&lt;0.25</a:t>
+            </a:r>
+          </a:p>
+        </p:txBody>
+      </p:sp>
+      <p:sp>
         <p:nvSpPr>
           <p:cNvPr id="4" name="Text Placeholder 2"/>
           <p:cNvSpPr>
@@ -2556,12 +2556,12 @@
           <a:p>
             <a:r>
               <a:rPr/>
-              <a:t>Complete Set FDR=1</a:t>
-            </a:r>
-          </a:p>
-        </p:txBody>
-      </p:sp>
-      <p:pic xmlns:a="http://schemas.openxmlformats.org/drawingml/2006/main" xmlns:r="http://schemas.openxmlformats.org/officeDocument/2006/relationships" xmlns:p="http://schemas.openxmlformats.org/presentationml/2006/main">
+              <a:t>Complete Set fdr=1</a:t>
+            </a:r>
+          </a:p>
+        </p:txBody>
+      </p:sp>
+      <p:pic>
         <p:nvPicPr>
           <p:cNvPr id="5" name="" descr=""/>
           <p:cNvPicPr>
@@ -2587,7 +2587,7 @@
           </a:prstGeom>
         </p:spPr>
       </p:pic>
-      <p:pic xmlns:a="http://schemas.openxmlformats.org/drawingml/2006/main" xmlns:r="http://schemas.openxmlformats.org/officeDocument/2006/relationships" xmlns:p="http://schemas.openxmlformats.org/presentationml/2006/main">
+      <p:pic>
         <p:nvPicPr>
           <p:cNvPr id="6" name="" descr=""/>
           <p:cNvPicPr>
@@ -2598,7 +2598,7 @@
           </p:nvPr>
         </p:nvPicPr>
         <p:blipFill>
-          <a:blip cstate="print" r:embed="rId3"/>
+          <a:blip cstate="print" r:embed="rId2"/>
           <a:stretch>
             <a:fillRect/>
           </a:stretch>
@@ -2638,7 +2638,7 @@
           <a:chExt cx="0" cy="0"/>
         </a:xfrm>
       </p:grpSpPr>
-      <p:sp xmlns:a="http://schemas.openxmlformats.org/drawingml/2006/main" xmlns:r="http://schemas.openxmlformats.org/officeDocument/2006/relationships" xmlns:p="http://schemas.openxmlformats.org/presentationml/2006/main">
+      <p:sp>
         <p:nvSpPr>
           <p:cNvPr id="2" name="Title 1"/>
           <p:cNvSpPr>
@@ -2665,7 +2665,7 @@
           </a:p>
         </p:txBody>
       </p:sp>
-      <p:sp xmlns:a="http://schemas.openxmlformats.org/drawingml/2006/main" xmlns:r="http://schemas.openxmlformats.org/officeDocument/2006/relationships" xmlns:p="http://schemas.openxmlformats.org/presentationml/2006/main">
+      <p:sp>
         <p:nvSpPr>
           <p:cNvPr id="3" name="Content Placeholder 2"/>
           <p:cNvSpPr>
@@ -2795,7 +2795,7 @@
           <a:chExt cx="0" cy="0"/>
         </a:xfrm>
       </p:grpSpPr>
-      <p:sp xmlns:a="http://schemas.openxmlformats.org/drawingml/2006/main" xmlns:r="http://schemas.openxmlformats.org/officeDocument/2006/relationships" xmlns:p="http://schemas.openxmlformats.org/presentationml/2006/main">
+      <p:sp>
         <p:nvSpPr>
           <p:cNvPr id="2" name="Title 1"/>
           <p:cNvSpPr>
@@ -2822,7 +2822,7 @@
           </a:p>
         </p:txBody>
       </p:sp>
-      <p:pic xmlns:a="http://schemas.openxmlformats.org/drawingml/2006/main" xmlns:r="http://schemas.openxmlformats.org/officeDocument/2006/relationships" xmlns:p="http://schemas.openxmlformats.org/presentationml/2006/main">
+      <p:pic>
         <p:nvPicPr>
           <p:cNvPr id="3" name="" descr=""/>
           <p:cNvPicPr>
@@ -2873,7 +2873,7 @@
           <a:chExt cx="0" cy="0"/>
         </a:xfrm>
       </p:grpSpPr>
-      <p:sp xmlns:a="http://schemas.openxmlformats.org/drawingml/2006/main" xmlns:r="http://schemas.openxmlformats.org/officeDocument/2006/relationships" xmlns:p="http://schemas.openxmlformats.org/presentationml/2006/main">
+      <p:sp>
         <p:nvSpPr>
           <p:cNvPr id="2" name="Title 1"/>
           <p:cNvSpPr>
@@ -2900,7 +2900,7 @@
           </a:p>
         </p:txBody>
       </p:sp>
-      <p:pic xmlns:a="http://schemas.openxmlformats.org/drawingml/2006/main" xmlns:r="http://schemas.openxmlformats.org/officeDocument/2006/relationships" xmlns:p="http://schemas.openxmlformats.org/presentationml/2006/main">
+      <p:pic>
         <p:nvPicPr>
           <p:cNvPr id="3" name="" descr=""/>
           <p:cNvPicPr>
@@ -2951,7 +2951,7 @@
           <a:chExt cx="0" cy="0"/>
         </a:xfrm>
       </p:grpSpPr>
-      <p:sp xmlns:a="http://schemas.openxmlformats.org/drawingml/2006/main" xmlns:r="http://schemas.openxmlformats.org/officeDocument/2006/relationships" xmlns:p="http://schemas.openxmlformats.org/presentationml/2006/main">
+      <p:sp>
         <p:nvSpPr>
           <p:cNvPr id="2" name="Title 1"/>
           <p:cNvSpPr>
@@ -2978,7 +2978,7 @@
           </a:p>
         </p:txBody>
       </p:sp>
-      <p:pic xmlns:a="http://schemas.openxmlformats.org/drawingml/2006/main" xmlns:r="http://schemas.openxmlformats.org/officeDocument/2006/relationships" xmlns:p="http://schemas.openxmlformats.org/presentationml/2006/main">
+      <p:pic>
         <p:nvPicPr>
           <p:cNvPr id="3" name="" descr=""/>
           <p:cNvPicPr>
@@ -3029,7 +3029,7 @@
           <a:chExt cx="0" cy="0"/>
         </a:xfrm>
       </p:grpSpPr>
-      <p:sp xmlns:a="http://schemas.openxmlformats.org/drawingml/2006/main" xmlns:r="http://schemas.openxmlformats.org/officeDocument/2006/relationships" xmlns:p="http://schemas.openxmlformats.org/presentationml/2006/main">
+      <p:sp>
         <p:nvSpPr>
           <p:cNvPr id="2" name="Title 1"/>
           <p:cNvSpPr>
@@ -3056,7 +3056,7 @@
           </a:p>
         </p:txBody>
       </p:sp>
-      <p:pic xmlns:a="http://schemas.openxmlformats.org/drawingml/2006/main" xmlns:r="http://schemas.openxmlformats.org/officeDocument/2006/relationships" xmlns:p="http://schemas.openxmlformats.org/presentationml/2006/main">
+      <p:pic>
         <p:nvPicPr>
           <p:cNvPr id="3" name="" descr=""/>
           <p:cNvPicPr>
@@ -3107,7 +3107,7 @@
           <a:chExt cx="0" cy="0"/>
         </a:xfrm>
       </p:grpSpPr>
-      <p:sp xmlns:a="http://schemas.openxmlformats.org/drawingml/2006/main" xmlns:r="http://schemas.openxmlformats.org/officeDocument/2006/relationships" xmlns:p="http://schemas.openxmlformats.org/presentationml/2006/main">
+      <p:sp>
         <p:nvSpPr>
           <p:cNvPr id="2" name="Title 1"/>
           <p:cNvSpPr>
@@ -3134,7 +3134,7 @@
           </a:p>
         </p:txBody>
       </p:sp>
-      <p:sp xmlns:a="http://schemas.openxmlformats.org/drawingml/2006/main" xmlns:r="http://schemas.openxmlformats.org/officeDocument/2006/relationships" xmlns:p="http://schemas.openxmlformats.org/presentationml/2006/main">
+      <p:sp>
         <p:nvSpPr>
           <p:cNvPr id="3" name="Text Placeholder 4"/>
           <p:cNvSpPr>
@@ -3161,7 +3161,7 @@
           </a:p>
         </p:txBody>
       </p:sp>
-      <p:sp xmlns:a="http://schemas.openxmlformats.org/drawingml/2006/main" xmlns:r="http://schemas.openxmlformats.org/officeDocument/2006/relationships" xmlns:p="http://schemas.openxmlformats.org/presentationml/2006/main">
+      <p:sp>
         <p:nvSpPr>
           <p:cNvPr id="4" name="Text Placeholder 2"/>
           <p:cNvSpPr>
@@ -3188,7 +3188,7 @@
           </a:p>
         </p:txBody>
       </p:sp>
-      <p:pic xmlns:a="http://schemas.openxmlformats.org/drawingml/2006/main" xmlns:r="http://schemas.openxmlformats.org/officeDocument/2006/relationships" xmlns:p="http://schemas.openxmlformats.org/presentationml/2006/main">
+      <p:pic>
         <p:nvPicPr>
           <p:cNvPr id="5" name="" descr=""/>
           <p:cNvPicPr>
@@ -3214,7 +3214,7 @@
           </a:prstGeom>
         </p:spPr>
       </p:pic>
-      <p:pic xmlns:a="http://schemas.openxmlformats.org/drawingml/2006/main" xmlns:r="http://schemas.openxmlformats.org/officeDocument/2006/relationships" xmlns:p="http://schemas.openxmlformats.org/presentationml/2006/main">
+      <p:pic>
         <p:nvPicPr>
           <p:cNvPr id="6" name="" descr=""/>
           <p:cNvPicPr>
@@ -3225,7 +3225,7 @@
           </p:nvPr>
         </p:nvPicPr>
         <p:blipFill>
-          <a:blip cstate="print" r:embed="rId3"/>
+          <a:blip cstate="print" r:embed="rId2"/>
           <a:stretch>
             <a:fillRect/>
           </a:stretch>
@@ -3265,7 +3265,7 @@
           <a:chExt cx="0" cy="0"/>
         </a:xfrm>
       </p:grpSpPr>
-      <p:sp xmlns:a="http://schemas.openxmlformats.org/drawingml/2006/main" xmlns:r="http://schemas.openxmlformats.org/officeDocument/2006/relationships" xmlns:p="http://schemas.openxmlformats.org/presentationml/2006/main">
+      <p:sp>
         <p:nvSpPr>
           <p:cNvPr id="2" name="Title 1"/>
           <p:cNvSpPr>
@@ -3292,7 +3292,7 @@
           </a:p>
         </p:txBody>
       </p:sp>
-      <p:sp xmlns:a="http://schemas.openxmlformats.org/drawingml/2006/main" xmlns:r="http://schemas.openxmlformats.org/officeDocument/2006/relationships" xmlns:p="http://schemas.openxmlformats.org/presentationml/2006/main">
+      <p:sp>
         <p:nvSpPr>
           <p:cNvPr id="3" name="Text Placeholder 4"/>
           <p:cNvSpPr>
@@ -3319,7 +3319,7 @@
           </a:p>
         </p:txBody>
       </p:sp>
-      <p:sp xmlns:a="http://schemas.openxmlformats.org/drawingml/2006/main" xmlns:r="http://schemas.openxmlformats.org/officeDocument/2006/relationships" xmlns:p="http://schemas.openxmlformats.org/presentationml/2006/main">
+      <p:sp>
         <p:nvSpPr>
           <p:cNvPr id="4" name="Text Placeholder 2"/>
           <p:cNvSpPr>
@@ -3346,7 +3346,7 @@
           </a:p>
         </p:txBody>
       </p:sp>
-      <p:pic xmlns:a="http://schemas.openxmlformats.org/drawingml/2006/main" xmlns:r="http://schemas.openxmlformats.org/officeDocument/2006/relationships" xmlns:p="http://schemas.openxmlformats.org/presentationml/2006/main">
+      <p:pic>
         <p:nvPicPr>
           <p:cNvPr id="5" name="" descr=""/>
           <p:cNvPicPr>
@@ -3372,7 +3372,7 @@
           </a:prstGeom>
         </p:spPr>
       </p:pic>
-      <p:pic xmlns:a="http://schemas.openxmlformats.org/drawingml/2006/main" xmlns:r="http://schemas.openxmlformats.org/officeDocument/2006/relationships" xmlns:p="http://schemas.openxmlformats.org/presentationml/2006/main">
+      <p:pic>
         <p:nvPicPr>
           <p:cNvPr id="6" name="" descr=""/>
           <p:cNvPicPr>
@@ -3383,7 +3383,7 @@
           </p:nvPr>
         </p:nvPicPr>
         <p:blipFill>
-          <a:blip cstate="print" r:embed="rId3"/>
+          <a:blip cstate="print" r:embed="rId2"/>
           <a:stretch>
             <a:fillRect/>
           </a:stretch>
@@ -3423,7 +3423,7 @@
           <a:chExt cx="0" cy="0"/>
         </a:xfrm>
       </p:grpSpPr>
-      <p:sp xmlns:a="http://schemas.openxmlformats.org/drawingml/2006/main" xmlns:r="http://schemas.openxmlformats.org/officeDocument/2006/relationships" xmlns:p="http://schemas.openxmlformats.org/presentationml/2006/main">
+      <p:sp>
         <p:nvSpPr>
           <p:cNvPr id="2" name="Title 1"/>
           <p:cNvSpPr>
@@ -3450,7 +3450,7 @@
           </a:p>
         </p:txBody>
       </p:sp>
-      <p:sp xmlns:a="http://schemas.openxmlformats.org/drawingml/2006/main" xmlns:r="http://schemas.openxmlformats.org/officeDocument/2006/relationships" xmlns:p="http://schemas.openxmlformats.org/presentationml/2006/main">
+      <p:sp>
         <p:nvSpPr>
           <p:cNvPr id="3" name="Text Placeholder 4"/>
           <p:cNvSpPr>
@@ -3477,7 +3477,7 @@
           </a:p>
         </p:txBody>
       </p:sp>
-      <p:sp xmlns:a="http://schemas.openxmlformats.org/drawingml/2006/main" xmlns:r="http://schemas.openxmlformats.org/officeDocument/2006/relationships" xmlns:p="http://schemas.openxmlformats.org/presentationml/2006/main">
+      <p:sp>
         <p:nvSpPr>
           <p:cNvPr id="4" name="Text Placeholder 2"/>
           <p:cNvSpPr>
@@ -3504,7 +3504,7 @@
           </a:p>
         </p:txBody>
       </p:sp>
-      <p:pic xmlns:a="http://schemas.openxmlformats.org/drawingml/2006/main" xmlns:r="http://schemas.openxmlformats.org/officeDocument/2006/relationships" xmlns:p="http://schemas.openxmlformats.org/presentationml/2006/main">
+      <p:pic>
         <p:nvPicPr>
           <p:cNvPr id="5" name="" descr=""/>
           <p:cNvPicPr>
@@ -3530,7 +3530,7 @@
           </a:prstGeom>
         </p:spPr>
       </p:pic>
-      <p:pic xmlns:a="http://schemas.openxmlformats.org/drawingml/2006/main" xmlns:r="http://schemas.openxmlformats.org/officeDocument/2006/relationships" xmlns:p="http://schemas.openxmlformats.org/presentationml/2006/main">
+      <p:pic>
         <p:nvPicPr>
           <p:cNvPr id="6" name="" descr=""/>
           <p:cNvPicPr>
@@ -3541,7 +3541,7 @@
           </p:nvPr>
         </p:nvPicPr>
         <p:blipFill>
-          <a:blip cstate="print" r:embed="rId3"/>
+          <a:blip cstate="print" r:embed="rId2"/>
           <a:stretch>
             <a:fillRect/>
           </a:stretch>
